--- a/thesis/presentations/chapter04_defence.pptx
+++ b/thesis/presentations/chapter04_defence.pptx
@@ -5153,7 +5153,7 @@
                 </a:solidFill>
                 <a:latin typeface="Calibri"/>
               </a:rPr>
-              <a:t>Calibration measured on 8 core classifiers and 38 binder endpoints, coverage on 10,000 held-out compounds</a:t>
+              <a:t>Calibration measured on 8 core classifiers and 38 binder endpoints, coverage on 8,803 held-out compounds</a:t>
             </a:r>
           </a:p>
         </p:txBody>
@@ -8988,7 +8988,7 @@
                 </a:solidFill>
                 <a:latin typeface="Calibri"/>
               </a:rPr>
-              <a:t>Mondrian, class-conditional, at a 0.90 target, on 10,000 held-out compounds</a:t>
+              <a:t>Mondrian, class-conditional, at a 0.90 target, on 8,803 held-out compounds</a:t>
             </a:r>
           </a:p>
         </p:txBody>
@@ -9266,7 +9266,7 @@
                 </a:solidFill>
                 <a:latin typeface="Calibri"/>
               </a:rPr>
-              <a:t>1,561</a:t>
+              <a:t>781</a:t>
             </a:r>
           </a:p>
         </p:txBody>
@@ -9301,11 +9301,11 @@
             <a:r>
               <a:rPr sz="1300" b="1" i="0">
                 <a:solidFill>
-                  <a:srgbClr val="1F3A5F"/>
-                </a:solidFill>
-                <a:latin typeface="Calibri"/>
-              </a:rPr>
-              <a:t>0.904</a:t>
+                  <a:srgbClr val="9E2A2B"/>
+                </a:solidFill>
+                <a:latin typeface="Calibri"/>
+              </a:rPr>
+              <a:t>0.896</a:t>
             </a:r>
           </a:p>
         </p:txBody>
@@ -9344,7 +9344,7 @@
                 </a:solidFill>
                 <a:latin typeface="Calibri"/>
               </a:rPr>
-              <a:t>1.013</a:t>
+              <a:t>1.215</a:t>
             </a:r>
           </a:p>
         </p:txBody>
@@ -9422,7 +9422,7 @@
                 </a:solidFill>
                 <a:latin typeface="Calibri"/>
               </a:rPr>
-              <a:t>1,064</a:t>
+              <a:t>1,025</a:t>
             </a:r>
           </a:p>
         </p:txBody>
@@ -9461,7 +9461,7 @@
                 </a:solidFill>
                 <a:latin typeface="Calibri"/>
               </a:rPr>
-              <a:t>0.921</a:t>
+              <a:t>0.933</a:t>
             </a:r>
           </a:p>
         </p:txBody>
@@ -9500,7 +9500,7 @@
                 </a:solidFill>
                 <a:latin typeface="Calibri"/>
               </a:rPr>
-              <a:t>1.019</a:t>
+              <a:t>1.045</a:t>
             </a:r>
           </a:p>
         </p:txBody>
@@ -9622,7 +9622,7 @@
                 </a:solidFill>
                 <a:latin typeface="Calibri"/>
               </a:rPr>
-              <a:t>678</a:t>
+              <a:t>656</a:t>
             </a:r>
           </a:p>
         </p:txBody>
@@ -9661,7 +9661,7 @@
                 </a:solidFill>
                 <a:latin typeface="Calibri"/>
               </a:rPr>
-              <a:t>0.917</a:t>
+              <a:t>0.905</a:t>
             </a:r>
           </a:p>
         </p:txBody>
@@ -9700,7 +9700,7 @@
                 </a:solidFill>
                 <a:latin typeface="Calibri"/>
               </a:rPr>
-              <a:t>1.009</a:t>
+              <a:t>1.017</a:t>
             </a:r>
           </a:p>
         </p:txBody>
@@ -9778,7 +9778,7 @@
                 </a:solidFill>
                 <a:latin typeface="Calibri"/>
               </a:rPr>
-              <a:t>1,793</a:t>
+              <a:t>1,642</a:t>
             </a:r>
           </a:p>
         </p:txBody>
@@ -9813,11 +9813,11 @@
             <a:r>
               <a:rPr sz="1300" b="1" i="0">
                 <a:solidFill>
-                  <a:srgbClr val="1F3A5F"/>
-                </a:solidFill>
-                <a:latin typeface="Calibri"/>
-              </a:rPr>
-              <a:t>0.906</a:t>
+                  <a:srgbClr val="9E2A2B"/>
+                </a:solidFill>
+                <a:latin typeface="Calibri"/>
+              </a:rPr>
+              <a:t>0.887</a:t>
             </a:r>
           </a:p>
         </p:txBody>
@@ -9856,7 +9856,7 @@
                 </a:solidFill>
                 <a:latin typeface="Calibri"/>
               </a:rPr>
-              <a:t>1.007</a:t>
+              <a:t>0.956</a:t>
             </a:r>
           </a:p>
         </p:txBody>
@@ -9978,7 +9978,7 @@
                 </a:solidFill>
                 <a:latin typeface="Calibri"/>
               </a:rPr>
-              <a:t>1,128</a:t>
+              <a:t>1,088</a:t>
             </a:r>
           </a:p>
         </p:txBody>
@@ -10013,11 +10013,11 @@
             <a:r>
               <a:rPr sz="1300" b="1" i="0">
                 <a:solidFill>
-                  <a:srgbClr val="1F3A5F"/>
-                </a:solidFill>
-                <a:latin typeface="Calibri"/>
-              </a:rPr>
-              <a:t>0.908</a:t>
+                  <a:srgbClr val="9E2A2B"/>
+                </a:solidFill>
+                <a:latin typeface="Calibri"/>
+              </a:rPr>
+              <a:t>0.876</a:t>
             </a:r>
           </a:p>
         </p:txBody>
@@ -10056,7 +10056,7 @@
                 </a:solidFill>
                 <a:latin typeface="Calibri"/>
               </a:rPr>
-              <a:t>1.030</a:t>
+              <a:t>0.991</a:t>
             </a:r>
           </a:p>
         </p:txBody>
@@ -10134,7 +10134,7 @@
                 </a:solidFill>
                 <a:latin typeface="Calibri"/>
               </a:rPr>
-              <a:t>758</a:t>
+              <a:t>717</a:t>
             </a:r>
           </a:p>
         </p:txBody>
@@ -10173,7 +10173,7 @@
                 </a:solidFill>
                 <a:latin typeface="Calibri"/>
               </a:rPr>
-              <a:t>0.889</a:t>
+              <a:t>0.888</a:t>
             </a:r>
           </a:p>
         </p:txBody>
@@ -10212,7 +10212,7 @@
                 </a:solidFill>
                 <a:latin typeface="Calibri"/>
               </a:rPr>
-              <a:t>1.012</a:t>
+              <a:t>1.006</a:t>
             </a:r>
           </a:p>
         </p:txBody>
@@ -10334,7 +10334,7 @@
                 </a:solidFill>
                 <a:latin typeface="Calibri"/>
               </a:rPr>
-              <a:t>962</a:t>
+              <a:t>907</a:t>
             </a:r>
           </a:p>
         </p:txBody>
@@ -10369,11 +10369,11 @@
             <a:r>
               <a:rPr sz="1300" b="1" i="0">
                 <a:solidFill>
-                  <a:srgbClr val="9E2A2B"/>
-                </a:solidFill>
-                <a:latin typeface="Calibri"/>
-              </a:rPr>
-              <a:t>0.899</a:t>
+                  <a:srgbClr val="1F3A5F"/>
+                </a:solidFill>
+                <a:latin typeface="Calibri"/>
+              </a:rPr>
+              <a:t>0.914</a:t>
             </a:r>
           </a:p>
         </p:txBody>
@@ -10412,7 +10412,7 @@
                 </a:solidFill>
                 <a:latin typeface="Calibri"/>
               </a:rPr>
-              <a:t>1.025</a:t>
+              <a:t>1.052</a:t>
             </a:r>
           </a:p>
         </p:txBody>
@@ -10490,7 +10490,7 @@
                 </a:solidFill>
                 <a:latin typeface="Calibri"/>
               </a:rPr>
-              <a:t>2,056</a:t>
+              <a:t>1,987</a:t>
             </a:r>
           </a:p>
         </p:txBody>
@@ -10529,7 +10529,7 @@
                 </a:solidFill>
                 <a:latin typeface="Calibri"/>
               </a:rPr>
-              <a:t>0.904</a:t>
+              <a:t>0.903</a:t>
             </a:r>
           </a:p>
         </p:txBody>
@@ -10568,7 +10568,7 @@
                 </a:solidFill>
                 <a:latin typeface="Calibri"/>
               </a:rPr>
-              <a:t>1.079</a:t>
+              <a:t>1.094</a:t>
             </a:r>
           </a:p>
         </p:txBody>
@@ -10610,7 +10610,7 @@
                 </a:solidFill>
                 <a:latin typeface="Calibri"/>
               </a:rPr>
-              <a:t>Coverage 0.889 to 0.921 against 0.90. 6 of 8 at or above target.</a:t>
+              <a:t>Coverage 0.876 to 0.933 against 0.90. 4 of 8 at or above target.</a:t>
             </a:r>
           </a:p>
         </p:txBody>
@@ -10738,7 +10738,7 @@
                 </a:solidFill>
                 <a:latin typeface="Calibri"/>
               </a:rPr>
-              <a:t>Mean set size 1.007 to 1.079 on a two-class problem. So 0.7 to 7.9 per cent of compounds get an empty set, meaning the compound conforms to neither class, or a set with both, meaning it separates neither. Neither statement is available from a point probability.</a:t>
+              <a:t>Mean set size 0.956 to 1.215 on a two-class problem. So 0.7 to 7.9 per cent of compounds get an empty set, meaning the compound conforms to neither class, or a set with both, meaning it separates neither. Neither statement is available from a point probability.</a:t>
             </a:r>
           </a:p>
         </p:txBody>
